--- a/catalog/samples/comparison_table.pptx
+++ b/catalog/samples/comparison_table.pptx
@@ -1472,7 +1472,7 @@
           </a:p>
           <a:p>
             <a:r>
-              <a:t>  "template_sha256": "95833299ef5ec4823dfd16b44db758ddce717234d3e7233dc520555942115f0c"</a:t>
+              <a:t>  "template_sha256": "6a8bf830aeb7963c6375baf5ca0eb66fd3579545238bc5d88899af05e572b8c6"</a:t>
             </a:r>
           </a:p>
           <a:p>
